--- a/docs/quickguides/pkw/pptx/15_Quick_Guide_oneSCM_HQ_Rolle_Blueprint_und_zentrale_Stammdaten_Pkw.pptx
+++ b/docs/quickguides/pkw/pptx/15_Quick_Guide_oneSCM_HQ_Rolle_Blueprint_und_zentrale_Stammdaten_Pkw.pptx
@@ -1525,7 +1525,7 @@
                 <a:ea typeface="MB Corpo S Text Office" pitchFamily="34" charset="-122"/>
                 <a:cs typeface="MB Corpo S Text Office" pitchFamily="34" charset="-120"/>
               </a:rPr>
-              <a:t>Dieses Dokument ist interaktiv – Verweise auf Handbuchkapitel und Systeme sind als Links hinterlegt.</a:t>
+              <a:t>Verweise auf Handbuchkapitel und Systeme sind hervorgehoben; E-Mail-Adressen sind als Links hinterlegt.</a:t>
             </a:r>
             <a:endParaRPr lang="en-US" sz="900" dirty="0"/>
           </a:p>
@@ -1795,7 +1795,7 @@
                 <a:ea typeface="MB Corpo S Text Office" pitchFamily="34" charset="-122"/>
                 <a:cs typeface="MB Corpo S Text Office" pitchFamily="34" charset="-120"/>
               </a:rPr>
-              <a:t>Technical Options, SA-Matching und Coverage-Codes</a:t>
+              <a:t>Technical Options, SA-Matching, Coverage- und Industry-Codes</a:t>
             </a:r>
             <a:endParaRPr lang="en-US" sz="900" dirty="0"/>
           </a:p>
@@ -2189,7 +2189,7 @@
         <p:spPr>
           <a:xfrm>
             <a:off x="5065776" y="4325112"/>
-            <a:ext cx="4645152" cy="1024128"/>
+            <a:ext cx="4645152" cy="1161288"/>
           </a:xfrm>
           <a:prstGeom prst="rect">
             <a:avLst/>
@@ -2361,18 +2361,18 @@
                 <a:ea typeface="MB Corpo S Text Office" pitchFamily="34" charset="-122"/>
                 <a:cs typeface="MB Corpo S Text Office" pitchFamily="34" charset="-120"/>
               </a:rPr>
-              <a:t>Technical Options, SA-Matching und Coverage-Codes</a:t>
-            </a:r>
-            <a:r>
-              <a:rPr lang="en-US" sz="900" dirty="0">
-                <a:solidFill>
-                  <a:srgbClr val="262626"/>
-                </a:solidFill>
-                <a:latin typeface="MB Corpo S Text Office" pitchFamily="34" charset="0"/>
-                <a:ea typeface="MB Corpo S Text Office" pitchFamily="34" charset="-122"/>
-                <a:cs typeface="MB Corpo S Text Office" pitchFamily="34" charset="-120"/>
-              </a:rPr>
-              <a:t> zentral (15.7); sie steuern Produktzuordnung und Leistungsbezug.</a:t>
+              <a:t>Technical Options, SA-Matching, Coverage- und Industry-Codes</a:t>
+            </a:r>
+            <a:r>
+              <a:rPr lang="en-US" sz="900" dirty="0">
+                <a:solidFill>
+                  <a:srgbClr val="262626"/>
+                </a:solidFill>
+                <a:latin typeface="MB Corpo S Text Office" pitchFamily="34" charset="0"/>
+                <a:ea typeface="MB Corpo S Text Office" pitchFamily="34" charset="-122"/>
+                <a:cs typeface="MB Corpo S Text Office" pitchFamily="34" charset="-120"/>
+              </a:rPr>
+              <a:t> zentral (15.7); sie steuern Produktzuordnung und Leistungsbezug. Märkte erscheinen dabei in der Sprache der Markteinstellungen.</a:t>
             </a:r>
             <a:endParaRPr lang="en-US" sz="900" dirty="0"/>
           </a:p>
@@ -3142,11 +3142,11 @@
         <p:spPr>
           <a:xfrm>
             <a:off x="201168" y="4242816"/>
-            <a:ext cx="4663440" cy="1170432"/>
+            <a:ext cx="4663440" cy="1316736"/>
           </a:xfrm>
           <a:prstGeom prst="roundRect">
             <a:avLst>
-              <a:gd name="adj" fmla="val 7813"/>
+              <a:gd name="adj" fmla="val 6944"/>
             </a:avLst>
           </a:prstGeom>
           <a:solidFill>
@@ -3210,7 +3210,7 @@
         <p:spPr>
           <a:xfrm>
             <a:off x="310896" y="4590288"/>
-            <a:ext cx="4480560" cy="768096"/>
+            <a:ext cx="4480560" cy="914400"/>
           </a:xfrm>
           <a:prstGeom prst="rect">
             <a:avLst/>
@@ -3259,7 +3259,7 @@
                 <a:ea typeface="MB Corpo S Text Office" pitchFamily="34" charset="-122"/>
                 <a:cs typeface="MB Corpo S Text Office" pitchFamily="34" charset="-120"/>
               </a:rPr>
-              <a:t>HQ-Freigaben sind im Klärungsregister nachvollziehbar (Anhang F).</a:t>
+              <a:t>Gruppennamen technischer Optionen sind je Division eindeutig; der Blueprint-Assistent endet mit dem Schritt „Overview &amp; Confirmation“ (15.2, 15.7).</a:t>
             </a:r>
             <a:endParaRPr lang="en-US" sz="900" dirty="0"/>
           </a:p>
